--- a/RAC/5일과정/01장/1장_RAC개요와아키텍처.pptx
+++ b/RAC/5일과정/01장/1장_RAC개요와아키텍처.pptx
@@ -1450,7 +1450,7 @@
           <a:lstStyle/>
           <a:p>
             <a:r>
-              <a:t>이 과정의 실습은 설치 가이드 v2로 구축한 환경에서 진행합니다. 설치 절차는 가이드에 있으므로 과정에서는 다루지 않고, 설치가 끝난 상태에서 시작합니다. Grid 홈과 DB 홈의 경로, 그리고 데이터베이스와 PDB 이름을 확인해 두십시오. ASM 실습에서는 디스크그룹을 만들고 지우는 작업을 하므로, 운영용 디스크와 별도로 4GB짜리 test1부터 test6까지 여섯 개의 실습용 디스크를 추가로 붙여 둡니다. 이 디스크는 설치 가이드 2장과 같은 방법으로 공유 폴더에 만듭니다.</a:t>
+              <a:t>이 과정의 실습은 설치 가이드 v2로 구축한 환경에서 진행합니다. 설치 절차는 가이드에 있으므로 과정에서는 다루지 않고, 설치가 끝난 상태에서 시작합니다. Grid 홈과 DB 홈의 경로, 그리고 데이터베이스와 PDB 이름을 확인해 두십시오. ASM 실습에서는 디스크그룹을 만들고 지우는 작업을 하므로, 운영용 디스크와 별도로 4GB짜리 test1부터 test6까지 여섯 개의 실습용 디스크를 추가로 붙여 둡니다. 이 디스크는 설치를 마친 뒤 설치 가이드 부록 E의 절차로 추가합니다.</a:t>
             </a:r>
           </a:p>
         </p:txBody>
